--- a/docs/Camel-Getting-Started-Guide.pptx
+++ b/docs/Camel-Getting-Started-Guide.pptx
@@ -3322,7 +3322,7 @@
                 </a:solidFill>
                 <a:latin typeface="Menlo"/>
               </a:rPr>
-              <a:t>Spring Boot  3.5.14      Spring Cloud  2025.0.2</a:t>
+              <a:t>Spring Boot  4.1.1       Spring Cloud  2025.1.3</a:t>
             </a:r>
           </a:p>
           <a:p>
@@ -3341,7 +3341,7 @@
                 </a:solidFill>
                 <a:latin typeface="Menlo"/>
               </a:rPr>
-              <a:t>Camel        4.18.2      JDK           21</a:t>
+              <a:t>Camel        4.22.1      JDK           21</a:t>
             </a:r>
           </a:p>
           <a:p>
@@ -7625,7 +7625,7 @@
                 </a:solidFill>
                 <a:latin typeface="Helvetica Neue"/>
               </a:rPr>
-              <a:t>API-3  ProducerTemplate: Sending From Outside A Route</a:t>
+              <a:t>API-3  ProducerTemplate + Freemarker Mapping</a:t>
             </a:r>
           </a:p>
         </p:txBody>
@@ -7667,7 +7667,7 @@
                 </a:solidFill>
                 <a:latin typeface="Helvetica Neue"/>
               </a:rPr>
-              <a:t>POST /api/v1/orders/quote - calls a remote HTTP API and a local route</a:t>
+              <a:t>POST /api/v1/orders/quote - a template on the way out and on the way back, so the remote dialect never leaks in</a:t>
             </a:r>
           </a:p>
         </p:txBody>
@@ -7725,7 +7725,7 @@
         <p:spPr>
           <a:xfrm>
             <a:off x="658368" y="1755648"/>
-            <a:ext cx="6858000" cy="2651760"/>
+            <a:ext cx="6858000" cy="3451859"/>
           </a:xfrm>
           <a:prstGeom prst="roundRect">
             <a:avLst>
@@ -7801,7 +7801,7 @@
                 </a:solidFill>
                 <a:latin typeface="Helvetica Neue"/>
               </a:rPr>
-              <a:t>bean/RemoteCallService.java</a:t>
+              <a:t>bean/RemoteCallService.java - all four hops are the same ProducerTemplate</a:t>
             </a:r>
           </a:p>
         </p:txBody>
@@ -7815,7 +7815,7 @@
         <p:spPr>
           <a:xfrm>
             <a:off x="896112" y="2194560"/>
-            <a:ext cx="6400800" cy="2286000"/>
+            <a:ext cx="6400800" cy="3086099"/>
           </a:xfrm>
           <a:prstGeom prst="rect">
             <a:avLst/>
@@ -7843,7 +7843,7 @@
                 </a:solidFill>
                 <a:latin typeface="Menlo"/>
               </a:rPr>
-              <a:t>// Use 1: call a remote HTTP API</a:t>
+              <a:t>// 1. request.ftl: internal order -&gt; the remote system's format</a:t>
             </a:r>
           </a:p>
           <a:p>
@@ -7862,7 +7862,7 @@
                 </a:solidFill>
                 <a:latin typeface="Menlo"/>
               </a:rPr>
-              <a:t>String raw = producerTemplate.requestBodyAndHeaders(</a:t>
+              <a:t>String outbound = template.requestBodyAndHeader(</a:t>
             </a:r>
           </a:p>
           <a:p>
@@ -7881,7 +7881,7 @@
                 </a:solidFill>
                 <a:latin typeface="Menlo"/>
               </a:rPr>
-              <a:t>        "http://localhost:8080/mock/remote/fx-rate?bridgeEndpoint=true",</a:t>
+              <a:t>        "freemarker:templates/request.ftl", request, "msgId", msgId, String.class);</a:t>
             </a:r>
           </a:p>
           <a:p>
@@ -7900,7 +7900,7 @@
                 </a:solidFill>
                 <a:latin typeface="Menlo"/>
               </a:rPr>
-              <a:t>        json,</a:t>
+              <a:t/>
             </a:r>
           </a:p>
           <a:p>
@@ -7919,7 +7919,7 @@
                 </a:solidFill>
                 <a:latin typeface="Menlo"/>
               </a:rPr>
-              <a:t>        Map.of(Exchange.HTTP_METHOD, "POST",</a:t>
+              <a:t>// 2. ProducerTemplate makes the real HTTP call</a:t>
             </a:r>
           </a:p>
           <a:p>
@@ -7938,7 +7938,7 @@
                 </a:solidFill>
                 <a:latin typeface="Menlo"/>
               </a:rPr>
-              <a:t>               Exchange.CONTENT_TYPE, "application/json"),</a:t>
+              <a:t>String raw = template.requestBodyAndHeaders(</a:t>
             </a:r>
           </a:p>
           <a:p>
@@ -7957,7 +7957,7 @@
                 </a:solidFill>
                 <a:latin typeface="Menlo"/>
               </a:rPr>
-              <a:t>        String.class);</a:t>
+              <a:t>        "http://.../fx-rate?bridgeEndpoint=true", outbound,</a:t>
             </a:r>
           </a:p>
           <a:p>
@@ -7976,6 +7976,25 @@
                 </a:solidFill>
                 <a:latin typeface="Menlo"/>
               </a:rPr>
+              <a:t>        Map.of(Exchange.HTTP_METHOD, "POST"), String.class);</a:t>
+            </a:r>
+          </a:p>
+          <a:p>
+            <a:pPr algn="l">
+              <a:lnSpc>
+                <a:spcPct val="112000"/>
+              </a:lnSpc>
+              <a:spcAft>
+                <a:spcPts val="0"/>
+              </a:spcAft>
+            </a:pPr>
+            <a:r>
+              <a:rPr sz="1050" b="0">
+                <a:solidFill>
+                  <a:srgbClr val="E2E8F0"/>
+                </a:solidFill>
+                <a:latin typeface="Menlo"/>
+              </a:rPr>
               <a:t/>
             </a:r>
           </a:p>
@@ -7995,7 +8014,7 @@
                 </a:solidFill>
                 <a:latin typeface="Menlo"/>
               </a:rPr>
-              <a:t>// Use 2: call back into a local Camel route (direct: synchronous, same thread)</a:t>
+              <a:t>// 3. response.ftl: the remote reply -&gt; this application's format</a:t>
             </a:r>
           </a:p>
           <a:p>
@@ -8014,7 +8033,7 @@
                 </a:solidFill>
                 <a:latin typeface="Menlo"/>
               </a:rPr>
-              <a:t>Map&lt;String,Object&gt; fee = producerTemplate.requestBody(</a:t>
+              <a:t>String business = template.requestBody(</a:t>
             </a:r>
           </a:p>
           <a:p>
@@ -8033,7 +8052,64 @@
                 </a:solidFill>
                 <a:latin typeface="Menlo"/>
               </a:rPr>
-              <a:t>        "direct:api3-calc-fee", request, Map.class);</a:t>
+              <a:t>        "freemarker:templates/response.ftl", parse(raw), String.class);</a:t>
+            </a:r>
+          </a:p>
+          <a:p>
+            <a:pPr algn="l">
+              <a:lnSpc>
+                <a:spcPct val="112000"/>
+              </a:lnSpc>
+              <a:spcAft>
+                <a:spcPts val="0"/>
+              </a:spcAft>
+            </a:pPr>
+            <a:r>
+              <a:rPr sz="1050" b="0">
+                <a:solidFill>
+                  <a:srgbClr val="E2E8F0"/>
+                </a:solidFill>
+                <a:latin typeface="Menlo"/>
+              </a:rPr>
+              <a:t/>
+            </a:r>
+          </a:p>
+          <a:p>
+            <a:pPr algn="l">
+              <a:lnSpc>
+                <a:spcPct val="112000"/>
+              </a:lnSpc>
+              <a:spcAft>
+                <a:spcPts val="0"/>
+              </a:spcAft>
+            </a:pPr>
+            <a:r>
+              <a:rPr sz="1050" b="0">
+                <a:solidFill>
+                  <a:srgbClr val="E2E8F0"/>
+                </a:solidFill>
+                <a:latin typeface="Menlo"/>
+              </a:rPr>
+              <a:t>// 4. call back into a local Camel route (direct: synchronous)</a:t>
+            </a:r>
+          </a:p>
+          <a:p>
+            <a:pPr algn="l">
+              <a:lnSpc>
+                <a:spcPct val="112000"/>
+              </a:lnSpc>
+              <a:spcAft>
+                <a:spcPts val="0"/>
+              </a:spcAft>
+            </a:pPr>
+            <a:r>
+              <a:rPr sz="1050" b="0">
+                <a:solidFill>
+                  <a:srgbClr val="E2E8F0"/>
+                </a:solidFill>
+                <a:latin typeface="Menlo"/>
+              </a:rPr>
+              <a:t>Map&lt;String,Object&gt; fee = template.requestBody("direct:api3-calc-fee", request);</a:t>
             </a:r>
           </a:p>
         </p:txBody>
@@ -8161,7 +8237,7 @@
                 </a:solidFill>
                 <a:latin typeface="Helvetica Neue"/>
               </a:rPr>
-              <a:t>Camel's RestTemplate; the target can be any component</a:t>
+              <a:t>Camel's RestTemplate; target can be any component</a:t>
             </a:r>
           </a:p>
         </p:txBody>
@@ -8174,7 +8250,7 @@
         </p:nvSpPr>
         <p:spPr>
           <a:xfrm>
-            <a:off x="7699248" y="2798064"/>
+            <a:off x="7699248" y="2779776"/>
             <a:ext cx="91440" cy="91440"/>
           </a:xfrm>
           <a:prstGeom prst="ellipse">
@@ -8218,7 +8294,7 @@
         </p:nvSpPr>
         <p:spPr>
           <a:xfrm>
-            <a:off x="7936992" y="2724912"/>
+            <a:off x="7936992" y="2706624"/>
             <a:ext cx="3694176" cy="256032"/>
           </a:xfrm>
           <a:prstGeom prst="rect">
@@ -8247,7 +8323,7 @@
                 </a:solidFill>
                 <a:latin typeface="Helvetica Neue"/>
               </a:rPr>
-              <a:t>sendBody(...)</a:t>
+              <a:t>requestBody(...)</a:t>
             </a:r>
           </a:p>
         </p:txBody>
@@ -8260,7 +8336,7 @@
         </p:nvSpPr>
         <p:spPr>
           <a:xfrm>
-            <a:off x="7936992" y="2980944"/>
+            <a:off x="7936992" y="2962656"/>
             <a:ext cx="3694176" cy="256032"/>
           </a:xfrm>
           <a:prstGeom prst="rect">
@@ -8289,7 +8365,7 @@
                 </a:solidFill>
                 <a:latin typeface="Helvetica Neue"/>
               </a:rPr>
-              <a:t>InOnly: fire and continue, no reply</a:t>
+              <a:t>InOut: waits for the reply; sendBody does not</a:t>
             </a:r>
           </a:p>
         </p:txBody>
@@ -8302,7 +8378,7 @@
         </p:nvSpPr>
         <p:spPr>
           <a:xfrm>
-            <a:off x="7699248" y="3451860"/>
+            <a:off x="7699248" y="3415284"/>
             <a:ext cx="91440" cy="91440"/>
           </a:xfrm>
           <a:prstGeom prst="ellipse">
@@ -8346,7 +8422,7 @@
         </p:nvSpPr>
         <p:spPr>
           <a:xfrm>
-            <a:off x="7936992" y="3378708"/>
+            <a:off x="7936992" y="3342132"/>
             <a:ext cx="3694176" cy="256032"/>
           </a:xfrm>
           <a:prstGeom prst="rect">
@@ -8375,7 +8451,7 @@
                 </a:solidFill>
                 <a:latin typeface="Helvetica Neue"/>
               </a:rPr>
-              <a:t>requestBody(...)</a:t>
+              <a:t>freemarker:</a:t>
             </a:r>
           </a:p>
         </p:txBody>
@@ -8388,7 +8464,7 @@
         </p:nvSpPr>
         <p:spPr>
           <a:xfrm>
-            <a:off x="7936992" y="3634739"/>
+            <a:off x="7936992" y="3598163"/>
             <a:ext cx="3694176" cy="256032"/>
           </a:xfrm>
           <a:prstGeom prst="rect">
@@ -8417,7 +8493,7 @@
                 </a:solidFill>
                 <a:latin typeface="Helvetica Neue"/>
               </a:rPr>
-              <a:t>InOut: wait for and return the reply</a:t>
+              <a:t>The render becomes the new body</a:t>
             </a:r>
           </a:p>
         </p:txBody>
@@ -8430,7 +8506,7 @@
         </p:nvSpPr>
         <p:spPr>
           <a:xfrm>
-            <a:off x="7699248" y="4105656"/>
+            <a:off x="7699248" y="4050791"/>
             <a:ext cx="91440" cy="91440"/>
           </a:xfrm>
           <a:prstGeom prst="ellipse">
@@ -8474,7 +8550,7 @@
         </p:nvSpPr>
         <p:spPr>
           <a:xfrm>
-            <a:off x="7936992" y="4032504"/>
+            <a:off x="7936992" y="3977639"/>
             <a:ext cx="3694176" cy="256032"/>
           </a:xfrm>
           <a:prstGeom prst="rect">
@@ -8503,7 +8579,7 @@
                 </a:solidFill>
                 <a:latin typeface="Helvetica Neue"/>
               </a:rPr>
-              <a:t>Where the bean comes from</a:t>
+              <a:t>Anti-corruption layer</a:t>
             </a:r>
           </a:p>
         </p:txBody>
@@ -8516,7 +8592,7 @@
         </p:nvSpPr>
         <p:spPr>
           <a:xfrm>
-            <a:off x="7936992" y="4288536"/>
+            <a:off x="7936992" y="4233672"/>
             <a:ext cx="3694176" cy="256032"/>
           </a:xfrm>
           <a:prstGeom prst="rect">
@@ -8545,7 +8621,7 @@
                 </a:solidFill>
                 <a:latin typeface="Helvetica Neue"/>
               </a:rPr>
-              <a:t>&lt;camelContext&gt; registers one named template</a:t>
+              <a:t>Remote format lives in two .ftl files</a:t>
             </a:r>
           </a:p>
         </p:txBody>
@@ -8558,7 +8634,7 @@
         </p:nvSpPr>
         <p:spPr>
           <a:xfrm>
-            <a:off x="7699248" y="4759452"/>
+            <a:off x="7699248" y="4686299"/>
             <a:ext cx="91440" cy="91440"/>
           </a:xfrm>
           <a:prstGeom prst="ellipse">
@@ -8602,7 +8678,7 @@
         </p:nvSpPr>
         <p:spPr>
           <a:xfrm>
-            <a:off x="7936992" y="4686300"/>
+            <a:off x="7936992" y="4613147"/>
             <a:ext cx="3694176" cy="256032"/>
           </a:xfrm>
           <a:prstGeom prst="rect">
@@ -8631,7 +8707,7 @@
                 </a:solidFill>
                 <a:latin typeface="Helvetica Neue"/>
               </a:rPr>
-              <a:t>Must be a singleton</a:t>
+              <a:t>The template bean</a:t>
             </a:r>
           </a:p>
         </p:txBody>
@@ -8644,7 +8720,7 @@
         </p:nvSpPr>
         <p:spPr>
           <a:xfrm>
-            <a:off x="7936992" y="4942332"/>
+            <a:off x="7936992" y="4869179"/>
             <a:ext cx="3694176" cy="256032"/>
           </a:xfrm>
           <a:prstGeom prst="rect">
@@ -8673,7 +8749,7 @@
                 </a:solidFill>
                 <a:latin typeface="Helvetica Neue"/>
               </a:rPr>
-              <a:t>It holds an endpoint cache and thread pools</a:t>
+              <a:t>&lt;camelContext&gt; registers it; reuse as singleton</a:t>
             </a:r>
           </a:p>
         </p:txBody>
@@ -8686,7 +8762,7 @@
         </p:nvSpPr>
         <p:spPr>
           <a:xfrm>
-            <a:off x="658368" y="5230368"/>
+            <a:off x="658368" y="5504688"/>
             <a:ext cx="10881360" cy="694944"/>
           </a:xfrm>
           <a:prstGeom prst="roundRect">
@@ -8734,7 +8810,7 @@
         </p:nvSpPr>
         <p:spPr>
           <a:xfrm>
-            <a:off x="658368" y="5230368"/>
+            <a:off x="658368" y="5504688"/>
             <a:ext cx="50292" cy="694944"/>
           </a:xfrm>
           <a:prstGeom prst="rect">
@@ -8778,7 +8854,7 @@
         </p:nvSpPr>
         <p:spPr>
           <a:xfrm>
-            <a:off x="841247" y="5349240"/>
+            <a:off x="841247" y="5623559"/>
             <a:ext cx="1097280" cy="219456"/>
           </a:xfrm>
           <a:prstGeom prst="rect">
@@ -8807,7 +8883,7 @@
                 </a:solidFill>
                 <a:latin typeface="Helvetica Neue"/>
               </a:rPr>
-              <a:t>COMPARE</a:t>
+              <a:t>STYLE</a:t>
             </a:r>
           </a:p>
         </p:txBody>
@@ -8820,7 +8896,7 @@
         </p:nvSpPr>
         <p:spPr>
           <a:xfrm>
-            <a:off x="1938528" y="5349240"/>
+            <a:off x="1938528" y="5623559"/>
             <a:ext cx="9418320" cy="512064"/>
           </a:xfrm>
           <a:prstGeom prst="rect">
@@ -8849,7 +8925,7 @@
                 </a:solidFill>
                 <a:latin typeface="Helvetica Neue"/>
               </a:rPr>
-              <a:t>Inside a route you send with &lt;to&gt;; in Java you send with a ProducerTemplate - both go through the same component and endpoint machinery. To call a Spring bean from a route, write &lt;to uri="bean:xxx?method=yyy"/&gt;.</a:t>
+              <a:t>A template can read body, headers and exchange. The outbound template gets the internal order Map; the inbound one gets the parsed remote reply - which is why the HTTP text is parsed once before it reaches the template.</a:t>
             </a:r>
           </a:p>
         </p:txBody>
@@ -8891,7 +8967,7 @@
                 </a:solidFill>
                 <a:latin typeface="Helvetica Neue"/>
               </a:rPr>
-              <a:t>Inject it with @Lazy, or the context hits a circular dependency</a:t>
+              <a:t>Both templates live in src/main/resources/templates/</a:t>
             </a:r>
           </a:p>
         </p:txBody>
